--- a/output/wordlabs-tall-3day.pptx
+++ b/output/wordlabs-tall-3day.pptx
@@ -4240,7 +4240,7 @@
                 <a:ea typeface="Calibri" pitchFamily="34" charset="-122"/>
                 <a:cs typeface="Calibri" pitchFamily="34" charset="-120"/>
               </a:rPr>
-              <a:t>"great height, high stature"</a:t>
+              <a:t>"high in stature or height"</a:t>
             </a:r>
             <a:endParaRPr lang="en-US" sz="2200" dirty="0"/>
           </a:p>
@@ -4279,7 +4279,7 @@
                 <a:ea typeface="Calibri" pitchFamily="34" charset="-122"/>
                 <a:cs typeface="Calibri" pitchFamily="34" charset="-120"/>
               </a:rPr>
-              <a:t>Origin: Old English: getæl</a:t>
+              <a:t>Origin: Latin: talius</a:t>
             </a:r>
             <a:endParaRPr lang="en-US" sz="1300" dirty="0"/>
           </a:p>
@@ -5288,7 +5288,7 @@
                 <a:ea typeface="Calibri" pitchFamily="34" charset="-122"/>
                 <a:cs typeface="Calibri" pitchFamily="34" charset="-120"/>
               </a:rPr>
-              <a:t>Word Labs  •  wordlabs.app  •  Root: 'tall' = great height, high stature</a:t>
+              <a:t>Word Labs  •  wordlabs.app  •  Root: 'tall' = high in stature or height</a:t>
             </a:r>
             <a:endParaRPr lang="en-US" sz="800" dirty="0"/>
           </a:p>
@@ -5928,7 +5928,7 @@
                 <a:ea typeface="Calibri" pitchFamily="34" charset="-122"/>
                 <a:cs typeface="Calibri" pitchFamily="34" charset="-120"/>
               </a:rPr>
-              <a:t>Word Labs  •  wordlabs.app  •  Root: 'tall' = great height, high stature</a:t>
+              <a:t>Word Labs  •  wordlabs.app  •  Root: 'tall' = high in stature or height</a:t>
             </a:r>
             <a:endParaRPr lang="en-US" sz="800" dirty="0"/>
           </a:p>
@@ -6071,7 +6071,7 @@
                 <a:ea typeface="Calibri" pitchFamily="34" charset="-122"/>
                 <a:cs typeface="Calibri" pitchFamily="34" charset="-120"/>
               </a:rPr>
-              <a:t> player on the team showed great </a:t>
+              <a:t> player on the team was also known for her </a:t>
             </a:r>
             <a:pPr algn="l" indent="0" marL="0">
               <a:buNone/>
@@ -6102,7 +6102,7 @@
                 <a:ea typeface="Calibri" pitchFamily="34" charset="-122"/>
                 <a:cs typeface="Calibri" pitchFamily="34" charset="-120"/>
               </a:rPr>
-              <a:t> when standing next to the coach.</a:t>
+              <a:t> and amazing skill.</a:t>
             </a:r>
             <a:endParaRPr lang="en-US" sz="1800" dirty="0"/>
           </a:p>
@@ -6716,7 +6716,7 @@
                 <a:ea typeface="Calibri" pitchFamily="34" charset="-122"/>
                 <a:cs typeface="Calibri" pitchFamily="34" charset="-120"/>
               </a:rPr>
-              <a:t>Word Labs  •  wordlabs.app  •  Root: 'tall' = great height, high stature</a:t>
+              <a:t>Word Labs  •  wordlabs.app  •  Root: 'tall' = high in stature or height</a:t>
             </a:r>
             <a:endParaRPr lang="en-US" sz="800" dirty="0"/>
           </a:p>
@@ -7543,7 +7543,7 @@
                 <a:ea typeface="Calibri" pitchFamily="34" charset="-122"/>
                 <a:cs typeface="Calibri" pitchFamily="34" charset="-120"/>
               </a:rPr>
-              <a:t>Word Labs  •  wordlabs.app  •  Root: 'tall' = great height, high stature</a:t>
+              <a:t>Word Labs  •  wordlabs.app  •  Root: 'tall' = high in stature or height</a:t>
             </a:r>
             <a:endParaRPr lang="en-US" sz="800" dirty="0"/>
           </a:p>
@@ -7860,7 +7860,7 @@
                 <a:ea typeface="Calibri" pitchFamily="34" charset="-122"/>
                 <a:cs typeface="Calibri" pitchFamily="34" charset="-120"/>
               </a:rPr>
-              <a:t>great height</a:t>
+              <a:t>high in stature or height</a:t>
             </a:r>
             <a:endParaRPr lang="en-US" sz="850" dirty="0"/>
           </a:p>
@@ -7972,7 +7972,7 @@
                 <a:ea typeface="Calibri" pitchFamily="34" charset="-122"/>
                 <a:cs typeface="Calibri" pitchFamily="34" charset="-120"/>
               </a:rPr>
-              <a:t>most, greatest degree</a:t>
+              <a:t>the most</a:t>
             </a:r>
             <a:endParaRPr lang="en-US" sz="850" dirty="0"/>
           </a:p>
@@ -8528,7 +8528,7 @@
                 <a:ea typeface="Calibri" pitchFamily="34" charset="-122"/>
                 <a:cs typeface="Calibri" pitchFamily="34" charset="-120"/>
               </a:rPr>
-              <a:t>Word Labs  •  wordlabs.app  •  Root: 'tall' = great height, high stature</a:t>
+              <a:t>Word Labs  •  wordlabs.app  •  Root: 'tall' = high in stature or height</a:t>
             </a:r>
             <a:endParaRPr lang="en-US" sz="800" dirty="0"/>
           </a:p>
@@ -8845,7 +8845,7 @@
                 <a:ea typeface="Calibri" pitchFamily="34" charset="-122"/>
                 <a:cs typeface="Calibri" pitchFamily="34" charset="-120"/>
               </a:rPr>
-              <a:t>great height</a:t>
+              <a:t>high in stature or height</a:t>
             </a:r>
             <a:endParaRPr lang="en-US" sz="850" dirty="0"/>
           </a:p>
@@ -8957,7 +8957,7 @@
                 <a:ea typeface="Calibri" pitchFamily="34" charset="-122"/>
                 <a:cs typeface="Calibri" pitchFamily="34" charset="-120"/>
               </a:rPr>
-              <a:t>most, greatest degree</a:t>
+              <a:t>the most</a:t>
             </a:r>
             <a:endParaRPr lang="en-US" sz="850" dirty="0"/>
           </a:p>
@@ -9645,7 +9645,7 @@
                 <a:ea typeface="Calibri" pitchFamily="34" charset="-122"/>
                 <a:cs typeface="Calibri" pitchFamily="34" charset="-120"/>
               </a:rPr>
-              <a:t>Word Labs  •  wordlabs.app  •  Root: 'tall' = great height, high stature</a:t>
+              <a:t>Word Labs  •  wordlabs.app  •  Root: 'tall' = high in stature or height</a:t>
             </a:r>
             <a:endParaRPr lang="en-US" sz="800" dirty="0"/>
           </a:p>
@@ -9962,7 +9962,7 @@
                 <a:ea typeface="Calibri" pitchFamily="34" charset="-122"/>
                 <a:cs typeface="Calibri" pitchFamily="34" charset="-120"/>
               </a:rPr>
-              <a:t>great height</a:t>
+              <a:t>high in stature or height</a:t>
             </a:r>
             <a:endParaRPr lang="en-US" sz="850" dirty="0"/>
           </a:p>
@@ -10074,7 +10074,7 @@
                 <a:ea typeface="Calibri" pitchFamily="34" charset="-122"/>
                 <a:cs typeface="Calibri" pitchFamily="34" charset="-120"/>
               </a:rPr>
-              <a:t>most, greatest degree</a:t>
+              <a:t>the most</a:t>
             </a:r>
             <a:endParaRPr lang="en-US" sz="850" dirty="0"/>
           </a:p>
@@ -11119,7 +11119,7 @@
                 <a:ea typeface="Calibri" pitchFamily="34" charset="-122"/>
                 <a:cs typeface="Calibri" pitchFamily="34" charset="-120"/>
               </a:rPr>
-              <a:t>Word Labs  •  wordlabs.app  •  Root: 'tall' = great height, high stature</a:t>
+              <a:t>Word Labs  •  wordlabs.app  •  Root: 'tall' = high in stature or height</a:t>
             </a:r>
             <a:endParaRPr lang="en-US" sz="800" dirty="0"/>
           </a:p>
@@ -11946,7 +11946,7 @@
                 <a:ea typeface="Calibri" pitchFamily="34" charset="-122"/>
                 <a:cs typeface="Calibri" pitchFamily="34" charset="-120"/>
               </a:rPr>
-              <a:t>Word Labs  •  wordlabs.app  •  Root: 'tall' = great height, high stature</a:t>
+              <a:t>Word Labs  •  wordlabs.app  •  Root: 'tall' = high in stature or height</a:t>
             </a:r>
             <a:endParaRPr lang="en-US" sz="800" dirty="0"/>
           </a:p>
@@ -12263,7 +12263,7 @@
                 <a:ea typeface="Calibri" pitchFamily="34" charset="-122"/>
                 <a:cs typeface="Calibri" pitchFamily="34" charset="-120"/>
               </a:rPr>
-              <a:t>great height</a:t>
+              <a:t>high in stature or height</a:t>
             </a:r>
             <a:endParaRPr lang="en-US" sz="850" dirty="0"/>
           </a:p>
@@ -12375,7 +12375,7 @@
                 <a:ea typeface="Calibri" pitchFamily="34" charset="-122"/>
                 <a:cs typeface="Calibri" pitchFamily="34" charset="-120"/>
               </a:rPr>
-              <a:t>state or quality of</a:t>
+              <a:t>the state or quality of</a:t>
             </a:r>
             <a:endParaRPr lang="en-US" sz="850" dirty="0"/>
           </a:p>
@@ -12931,7 +12931,7 @@
                 <a:ea typeface="Calibri" pitchFamily="34" charset="-122"/>
                 <a:cs typeface="Calibri" pitchFamily="34" charset="-120"/>
               </a:rPr>
-              <a:t>Word Labs  •  wordlabs.app  •  Root: 'tall' = great height, high stature</a:t>
+              <a:t>Word Labs  •  wordlabs.app  •  Root: 'tall' = high in stature or height</a:t>
             </a:r>
             <a:endParaRPr lang="en-US" sz="800" dirty="0"/>
           </a:p>
@@ -13248,7 +13248,7 @@
                 <a:ea typeface="Calibri" pitchFamily="34" charset="-122"/>
                 <a:cs typeface="Calibri" pitchFamily="34" charset="-120"/>
               </a:rPr>
-              <a:t>great height</a:t>
+              <a:t>high in stature or height</a:t>
             </a:r>
             <a:endParaRPr lang="en-US" sz="850" dirty="0"/>
           </a:p>
@@ -13360,7 +13360,7 @@
                 <a:ea typeface="Calibri" pitchFamily="34" charset="-122"/>
                 <a:cs typeface="Calibri" pitchFamily="34" charset="-120"/>
               </a:rPr>
-              <a:t>state or quality of</a:t>
+              <a:t>the state or quality of</a:t>
             </a:r>
             <a:endParaRPr lang="en-US" sz="850" dirty="0"/>
           </a:p>
@@ -13957,7 +13957,7 @@
                 <a:ea typeface="Calibri" pitchFamily="34" charset="-122"/>
                 <a:cs typeface="Calibri" pitchFamily="34" charset="-120"/>
               </a:rPr>
-              <a:t>Root 'tall' — great height, high stature</a:t>
+              <a:t>Root 'tall' — high in stature or height</a:t>
             </a:r>
             <a:endParaRPr lang="en-US" sz="1600" dirty="0"/>
           </a:p>
@@ -14313,7 +14313,7 @@
                 <a:ea typeface="Calibri" pitchFamily="34" charset="-122"/>
                 <a:cs typeface="Calibri" pitchFamily="34" charset="-120"/>
               </a:rPr>
-              <a:t>Word Labs  •  wordlabs.app  •  Root: 'tall' = great height, high stature</a:t>
+              <a:t>Word Labs  •  wordlabs.app  •  Root: 'tall' = high in stature or height</a:t>
             </a:r>
             <a:endParaRPr lang="en-US" sz="800" dirty="0"/>
           </a:p>
@@ -14630,7 +14630,7 @@
                 <a:ea typeface="Calibri" pitchFamily="34" charset="-122"/>
                 <a:cs typeface="Calibri" pitchFamily="34" charset="-120"/>
               </a:rPr>
-              <a:t>great height</a:t>
+              <a:t>high in stature or height</a:t>
             </a:r>
             <a:endParaRPr lang="en-US" sz="850" dirty="0"/>
           </a:p>
@@ -14742,7 +14742,7 @@
                 <a:ea typeface="Calibri" pitchFamily="34" charset="-122"/>
                 <a:cs typeface="Calibri" pitchFamily="34" charset="-120"/>
               </a:rPr>
-              <a:t>state or quality of</a:t>
+              <a:t>the state or quality of</a:t>
             </a:r>
             <a:endParaRPr lang="en-US" sz="850" dirty="0"/>
           </a:p>
@@ -16069,7 +16069,7 @@
                 <a:ea typeface="Calibri" pitchFamily="34" charset="-122"/>
                 <a:cs typeface="Calibri" pitchFamily="34" charset="-120"/>
               </a:rPr>
-              <a:t>Word Labs  •  wordlabs.app  •  Root: 'tall' = great height, high stature</a:t>
+              <a:t>Word Labs  •  wordlabs.app  •  Root: 'tall' = high in stature or height</a:t>
             </a:r>
             <a:endParaRPr lang="en-US" sz="800" dirty="0"/>
           </a:p>
@@ -16709,7 +16709,7 @@
                 <a:ea typeface="Calibri" pitchFamily="34" charset="-122"/>
                 <a:cs typeface="Calibri" pitchFamily="34" charset="-120"/>
               </a:rPr>
-              <a:t>Word Labs  •  wordlabs.app  •  Root: 'tall' = great height, high stature</a:t>
+              <a:t>Word Labs  •  wordlabs.app  •  Root: 'tall' = high in stature or height</a:t>
             </a:r>
             <a:endParaRPr lang="en-US" sz="800" dirty="0"/>
           </a:p>
@@ -16821,7 +16821,7 @@
                 <a:ea typeface="Calibri" pitchFamily="34" charset="-122"/>
                 <a:cs typeface="Calibri" pitchFamily="34" charset="-120"/>
               </a:rPr>
-              <a:t>Although she was the </a:t>
+              <a:t>The </a:t>
             </a:r>
             <a:pPr algn="l" indent="0" marL="0">
               <a:buNone/>
@@ -16838,7 +16838,7 @@
                 <a:ea typeface="Calibri" pitchFamily="34" charset="-122"/>
                 <a:cs typeface="Calibri" pitchFamily="34" charset="-120"/>
               </a:rPr>
-              <a:t>tallest</a:t>
+              <a:t>tallish</a:t>
             </a:r>
             <a:pPr algn="l" indent="0" marL="0">
               <a:buNone/>
@@ -16852,7 +16852,7 @@
                 <a:ea typeface="Calibri" pitchFamily="34" charset="-122"/>
                 <a:cs typeface="Calibri" pitchFamily="34" charset="-120"/>
               </a:rPr>
-              <a:t> in class, her </a:t>
+              <a:t> boy became </a:t>
             </a:r>
             <a:pPr algn="l" indent="0" marL="0">
               <a:buNone/>
@@ -16869,7 +16869,7 @@
                 <a:ea typeface="Calibri" pitchFamily="34" charset="-122"/>
                 <a:cs typeface="Calibri" pitchFamily="34" charset="-120"/>
               </a:rPr>
-              <a:t>tallness</a:t>
+              <a:t>taller</a:t>
             </a:r>
             <a:pPr algn="l" indent="0" marL="0">
               <a:buNone/>
@@ -16883,7 +16883,7 @@
                 <a:ea typeface="Calibri" pitchFamily="34" charset="-122"/>
                 <a:cs typeface="Calibri" pitchFamily="34" charset="-120"/>
               </a:rPr>
-              <a:t> never stopped her from being kind, and she helped everyone with a </a:t>
+              <a:t> each year, and his </a:t>
             </a:r>
             <a:pPr algn="l" indent="0" marL="0">
               <a:buNone/>
@@ -16900,7 +16900,7 @@
                 <a:ea typeface="Calibri" pitchFamily="34" charset="-122"/>
                 <a:cs typeface="Calibri" pitchFamily="34" charset="-120"/>
               </a:rPr>
-              <a:t>tallish</a:t>
+              <a:t>tallboy</a:t>
             </a:r>
             <a:pPr algn="l" indent="0" marL="0">
               <a:buNone/>
@@ -16914,7 +16914,7 @@
                 <a:ea typeface="Calibri" pitchFamily="34" charset="-122"/>
                 <a:cs typeface="Calibri" pitchFamily="34" charset="-120"/>
               </a:rPr>
-              <a:t> grin.</a:t>
+              <a:t> was soon too short to reach.</a:t>
             </a:r>
             <a:endParaRPr lang="en-US" sz="1800" dirty="0"/>
           </a:p>
@@ -17069,7 +17069,7 @@
                 <a:ea typeface="Trebuchet MS" pitchFamily="34" charset="-122"/>
                 <a:cs typeface="Trebuchet MS" pitchFamily="34" charset="-120"/>
               </a:rPr>
-              <a:t>tallest</a:t>
+              <a:t>tallish</a:t>
             </a:r>
             <a:endParaRPr lang="en-US" sz="1400" dirty="0"/>
           </a:p>
@@ -17197,7 +17197,7 @@
                 <a:ea typeface="Trebuchet MS" pitchFamily="34" charset="-122"/>
                 <a:cs typeface="Trebuchet MS" pitchFamily="34" charset="-120"/>
               </a:rPr>
-              <a:t>tallness</a:t>
+              <a:t>taller</a:t>
             </a:r>
             <a:endParaRPr lang="en-US" sz="1400" dirty="0"/>
           </a:p>
@@ -17325,7 +17325,7 @@
                 <a:ea typeface="Trebuchet MS" pitchFamily="34" charset="-122"/>
                 <a:cs typeface="Trebuchet MS" pitchFamily="34" charset="-120"/>
               </a:rPr>
-              <a:t>tallish</a:t>
+              <a:t>tallboy</a:t>
             </a:r>
             <a:endParaRPr lang="en-US" sz="1400" dirty="0"/>
           </a:p>
@@ -17656,7 +17656,7 @@
                 <a:ea typeface="Calibri" pitchFamily="34" charset="-122"/>
                 <a:cs typeface="Calibri" pitchFamily="34" charset="-120"/>
               </a:rPr>
-              <a:t>Word Labs  •  wordlabs.app  •  Root: 'tall' = great height, high stature</a:t>
+              <a:t>Word Labs  •  wordlabs.app  •  Root: 'tall' = high in stature or height</a:t>
             </a:r>
             <a:endParaRPr lang="en-US" sz="800" dirty="0"/>
           </a:p>
@@ -17795,7 +17795,7 @@
                 <a:ea typeface="Trebuchet MS" pitchFamily="34" charset="-122"/>
                 <a:cs typeface="Trebuchet MS" pitchFamily="34" charset="-120"/>
               </a:rPr>
-              <a:t>tallest</a:t>
+              <a:t>tallish</a:t>
             </a:r>
             <a:endParaRPr lang="en-US" sz="2800" dirty="0"/>
           </a:p>
@@ -18483,7 +18483,7 @@
                 <a:ea typeface="Calibri" pitchFamily="34" charset="-122"/>
                 <a:cs typeface="Calibri" pitchFamily="34" charset="-120"/>
               </a:rPr>
-              <a:t>Word Labs  •  wordlabs.app  •  Root: 'tall' = great height, high stature</a:t>
+              <a:t>Word Labs  •  wordlabs.app  •  Root: 'tall' = high in stature or height</a:t>
             </a:r>
             <a:endParaRPr lang="en-US" sz="800" dirty="0"/>
           </a:p>
@@ -18622,7 +18622,7 @@
                 <a:ea typeface="Trebuchet MS" pitchFamily="34" charset="-122"/>
                 <a:cs typeface="Trebuchet MS" pitchFamily="34" charset="-120"/>
               </a:rPr>
-              <a:t>tallest</a:t>
+              <a:t>tallish</a:t>
             </a:r>
             <a:endParaRPr lang="en-US" sz="2800" dirty="0"/>
           </a:p>
@@ -18800,7 +18800,7 @@
                 <a:ea typeface="Calibri" pitchFamily="34" charset="-122"/>
                 <a:cs typeface="Calibri" pitchFamily="34" charset="-120"/>
               </a:rPr>
-              <a:t>great height</a:t>
+              <a:t>high in stature or height</a:t>
             </a:r>
             <a:endParaRPr lang="en-US" sz="850" dirty="0"/>
           </a:p>
@@ -18873,7 +18873,7 @@
                 <a:ea typeface="Trebuchet MS" pitchFamily="34" charset="-122"/>
                 <a:cs typeface="Trebuchet MS" pitchFamily="34" charset="-120"/>
               </a:rPr>
-              <a:t>est</a:t>
+              <a:t>ish</a:t>
             </a:r>
             <a:endParaRPr lang="en-US" sz="1300" dirty="0"/>
           </a:p>
@@ -18912,7 +18912,7 @@
                 <a:ea typeface="Calibri" pitchFamily="34" charset="-122"/>
                 <a:cs typeface="Calibri" pitchFamily="34" charset="-120"/>
               </a:rPr>
-              <a:t>most, greatest degree</a:t>
+              <a:t>somewhat or rather</a:t>
             </a:r>
             <a:endParaRPr lang="en-US" sz="850" dirty="0"/>
           </a:p>
@@ -19468,7 +19468,7 @@
                 <a:ea typeface="Calibri" pitchFamily="34" charset="-122"/>
                 <a:cs typeface="Calibri" pitchFamily="34" charset="-120"/>
               </a:rPr>
-              <a:t>Word Labs  •  wordlabs.app  •  Root: 'tall' = great height, high stature</a:t>
+              <a:t>Word Labs  •  wordlabs.app  •  Root: 'tall' = high in stature or height</a:t>
             </a:r>
             <a:endParaRPr lang="en-US" sz="800" dirty="0"/>
           </a:p>
@@ -19607,7 +19607,7 @@
                 <a:ea typeface="Trebuchet MS" pitchFamily="34" charset="-122"/>
                 <a:cs typeface="Trebuchet MS" pitchFamily="34" charset="-120"/>
               </a:rPr>
-              <a:t>tallest</a:t>
+              <a:t>tallish</a:t>
             </a:r>
             <a:endParaRPr lang="en-US" sz="2800" dirty="0"/>
           </a:p>
@@ -19785,7 +19785,7 @@
                 <a:ea typeface="Calibri" pitchFamily="34" charset="-122"/>
                 <a:cs typeface="Calibri" pitchFamily="34" charset="-120"/>
               </a:rPr>
-              <a:t>great height</a:t>
+              <a:t>high in stature or height</a:t>
             </a:r>
             <a:endParaRPr lang="en-US" sz="850" dirty="0"/>
           </a:p>
@@ -19858,7 +19858,7 @@
                 <a:ea typeface="Trebuchet MS" pitchFamily="34" charset="-122"/>
                 <a:cs typeface="Trebuchet MS" pitchFamily="34" charset="-120"/>
               </a:rPr>
-              <a:t>est</a:t>
+              <a:t>ish</a:t>
             </a:r>
             <a:endParaRPr lang="en-US" sz="1300" dirty="0"/>
           </a:p>
@@ -19897,7 +19897,7 @@
                 <a:ea typeface="Calibri" pitchFamily="34" charset="-122"/>
                 <a:cs typeface="Calibri" pitchFamily="34" charset="-120"/>
               </a:rPr>
-              <a:t>most, greatest degree</a:t>
+              <a:t>somewhat or rather</a:t>
             </a:r>
             <a:endParaRPr lang="en-US" sz="850" dirty="0"/>
           </a:p>
@@ -20161,7 +20161,7 @@
                 <a:ea typeface="Trebuchet MS" pitchFamily="34" charset="-122"/>
                 <a:cs typeface="Trebuchet MS" pitchFamily="34" charset="-120"/>
               </a:rPr>
-              <a:t>est</a:t>
+              <a:t>ish</a:t>
             </a:r>
             <a:endParaRPr lang="en-US" sz="1400" dirty="0"/>
           </a:p>
@@ -20585,7 +20585,7 @@
                 <a:ea typeface="Calibri" pitchFamily="34" charset="-122"/>
                 <a:cs typeface="Calibri" pitchFamily="34" charset="-120"/>
               </a:rPr>
-              <a:t>Word Labs  •  wordlabs.app  •  Root: 'tall' = great height, high stature</a:t>
+              <a:t>Word Labs  •  wordlabs.app  •  Root: 'tall' = high in stature or height</a:t>
             </a:r>
             <a:endParaRPr lang="en-US" sz="800" dirty="0"/>
           </a:p>
@@ -20724,7 +20724,7 @@
                 <a:ea typeface="Trebuchet MS" pitchFamily="34" charset="-122"/>
                 <a:cs typeface="Trebuchet MS" pitchFamily="34" charset="-120"/>
               </a:rPr>
-              <a:t>tallest</a:t>
+              <a:t>tallish</a:t>
             </a:r>
             <a:endParaRPr lang="en-US" sz="2800" dirty="0"/>
           </a:p>
@@ -20902,7 +20902,7 @@
                 <a:ea typeface="Calibri" pitchFamily="34" charset="-122"/>
                 <a:cs typeface="Calibri" pitchFamily="34" charset="-120"/>
               </a:rPr>
-              <a:t>great height</a:t>
+              <a:t>high in stature or height</a:t>
             </a:r>
             <a:endParaRPr lang="en-US" sz="850" dirty="0"/>
           </a:p>
@@ -20975,7 +20975,7 @@
                 <a:ea typeface="Trebuchet MS" pitchFamily="34" charset="-122"/>
                 <a:cs typeface="Trebuchet MS" pitchFamily="34" charset="-120"/>
               </a:rPr>
-              <a:t>est</a:t>
+              <a:t>ish</a:t>
             </a:r>
             <a:endParaRPr lang="en-US" sz="1300" dirty="0"/>
           </a:p>
@@ -21014,7 +21014,7 @@
                 <a:ea typeface="Calibri" pitchFamily="34" charset="-122"/>
                 <a:cs typeface="Calibri" pitchFamily="34" charset="-120"/>
               </a:rPr>
-              <a:t>most, greatest degree</a:t>
+              <a:t>somewhat or rather</a:t>
             </a:r>
             <a:endParaRPr lang="en-US" sz="850" dirty="0"/>
           </a:p>
@@ -21278,7 +21278,7 @@
                 <a:ea typeface="Trebuchet MS" pitchFamily="34" charset="-122"/>
                 <a:cs typeface="Trebuchet MS" pitchFamily="34" charset="-120"/>
               </a:rPr>
-              <a:t>est</a:t>
+              <a:t>ish</a:t>
             </a:r>
             <a:endParaRPr lang="en-US" sz="1400" dirty="0"/>
           </a:p>
@@ -21385,7 +21385,7 @@
         </p:nvSpPr>
         <p:spPr>
           <a:xfrm>
-            <a:off x="2254649" y="4169664"/>
+            <a:off x="2427732" y="4169664"/>
             <a:ext cx="685800" cy="475488"/>
           </a:xfrm>
           <a:prstGeom prst="rect">
@@ -21412,7 +21412,7 @@
         </p:nvSpPr>
         <p:spPr>
           <a:xfrm>
-            <a:off x="2254649" y="4169664"/>
+            <a:off x="2427732" y="4169664"/>
             <a:ext cx="685800" cy="475488"/>
           </a:xfrm>
           <a:prstGeom prst="rect">
@@ -21451,7 +21451,7 @@
         </p:nvSpPr>
         <p:spPr>
           <a:xfrm>
-            <a:off x="3293146" y="4169664"/>
+            <a:off x="3639312" y="4169664"/>
             <a:ext cx="685800" cy="475488"/>
           </a:xfrm>
           <a:prstGeom prst="rect">
@@ -21478,7 +21478,7 @@
         </p:nvSpPr>
         <p:spPr>
           <a:xfrm>
-            <a:off x="3293146" y="4169664"/>
+            <a:off x="3639312" y="4169664"/>
             <a:ext cx="685800" cy="475488"/>
           </a:xfrm>
           <a:prstGeom prst="rect">
@@ -21517,7 +21517,7 @@
         </p:nvSpPr>
         <p:spPr>
           <a:xfrm>
-            <a:off x="4331643" y="4169664"/>
+            <a:off x="4850892" y="4169664"/>
             <a:ext cx="685800" cy="475488"/>
           </a:xfrm>
           <a:prstGeom prst="rect">
@@ -21544,7 +21544,7 @@
         </p:nvSpPr>
         <p:spPr>
           <a:xfrm>
-            <a:off x="4331643" y="4169664"/>
+            <a:off x="4850892" y="4169664"/>
             <a:ext cx="685800" cy="475488"/>
           </a:xfrm>
           <a:prstGeom prst="rect">
@@ -21583,7 +21583,7 @@
         </p:nvSpPr>
         <p:spPr>
           <a:xfrm>
-            <a:off x="5370141" y="4169664"/>
+            <a:off x="6062472" y="4169664"/>
             <a:ext cx="685800" cy="475488"/>
           </a:xfrm>
           <a:prstGeom prst="rect">
@@ -21610,7 +21610,7 @@
         </p:nvSpPr>
         <p:spPr>
           <a:xfrm>
-            <a:off x="5370141" y="4169664"/>
+            <a:off x="6062472" y="4169664"/>
             <a:ext cx="685800" cy="475488"/>
           </a:xfrm>
           <a:prstGeom prst="rect">
@@ -21635,7 +21635,7 @@
                 <a:ea typeface="Trebuchet MS" pitchFamily="34" charset="-122"/>
                 <a:cs typeface="Trebuchet MS" pitchFamily="34" charset="-120"/>
               </a:rPr>
-              <a:t>e</a:t>
+              <a:t>i</a:t>
             </a:r>
             <a:endParaRPr lang="en-US" sz="900" dirty="0"/>
           </a:p>
@@ -21649,7 +21649,7 @@
         </p:nvSpPr>
         <p:spPr>
           <a:xfrm>
-            <a:off x="6408638" y="4169664"/>
+            <a:off x="7274052" y="4169664"/>
             <a:ext cx="685800" cy="475488"/>
           </a:xfrm>
           <a:prstGeom prst="rect">
@@ -21676,7 +21676,7 @@
         </p:nvSpPr>
         <p:spPr>
           <a:xfrm>
-            <a:off x="6408638" y="4169664"/>
+            <a:off x="7274052" y="4169664"/>
             <a:ext cx="685800" cy="475488"/>
           </a:xfrm>
           <a:prstGeom prst="rect">
@@ -21701,73 +21701,7 @@
                 <a:ea typeface="Trebuchet MS" pitchFamily="34" charset="-122"/>
                 <a:cs typeface="Trebuchet MS" pitchFamily="34" charset="-120"/>
               </a:rPr>
-              <a:t>s</a:t>
-            </a:r>
-            <a:endParaRPr lang="en-US" sz="900" dirty="0"/>
-          </a:p>
-        </p:txBody>
-      </p:sp>
-      <p:sp>
-        <p:nvSpPr>
-          <p:cNvPr id="43" name="Shape 41"/>
-          <p:cNvSpPr/>
-          <p:nvPr/>
-        </p:nvSpPr>
-        <p:spPr>
-          <a:xfrm>
-            <a:off x="7447135" y="4169664"/>
-            <a:ext cx="685800" cy="475488"/>
-          </a:xfrm>
-          <a:prstGeom prst="rect">
-            <a:avLst>
-              <a:gd name="adj" fmla="val 7692"/>
-            </a:avLst>
-          </a:prstGeom>
-          <a:solidFill>
-            <a:srgbClr val="FFFFFF"/>
-          </a:solidFill>
-          <a:ln w="12700">
-            <a:solidFill>
-              <a:srgbClr val="DB2777"/>
-            </a:solidFill>
-            <a:prstDash val="solid"/>
-          </a:ln>
-        </p:spPr>
-      </p:sp>
-      <p:sp>
-        <p:nvSpPr>
-          <p:cNvPr id="44" name="Text 42"/>
-          <p:cNvSpPr/>
-          <p:nvPr/>
-        </p:nvSpPr>
-        <p:spPr>
-          <a:xfrm>
-            <a:off x="7447135" y="4169664"/>
-            <a:ext cx="685800" cy="475488"/>
-          </a:xfrm>
-          <a:prstGeom prst="rect">
-            <a:avLst/>
-          </a:prstGeom>
-          <a:noFill/>
-          <a:ln/>
-        </p:spPr>
-        <p:txBody>
-          <a:bodyPr wrap="square" lIns="0" tIns="0" rIns="0" bIns="0" rtlCol="0" anchor="ctr"/>
-          <a:lstStyle/>
-          <a:p>
-            <a:pPr algn="ctr" indent="0" marL="0">
-              <a:buNone/>
-            </a:pPr>
-            <a:r>
-              <a:rPr lang="en-US" sz="900" b="1" dirty="0">
-                <a:solidFill>
-                  <a:srgbClr val="9D174D"/>
-                </a:solidFill>
-                <a:latin typeface="Trebuchet MS" pitchFamily="34" charset="0"/>
-                <a:ea typeface="Trebuchet MS" pitchFamily="34" charset="-122"/>
-                <a:cs typeface="Trebuchet MS" pitchFamily="34" charset="-120"/>
-              </a:rPr>
-              <a:t>t</a:t>
+              <a:t>sh</a:t>
             </a:r>
             <a:endParaRPr lang="en-US" sz="900" dirty="0"/>
           </a:p>
@@ -22059,7 +21993,7 @@
                 <a:ea typeface="Calibri" pitchFamily="34" charset="-122"/>
                 <a:cs typeface="Calibri" pitchFamily="34" charset="-120"/>
               </a:rPr>
-              <a:t>Word Labs  •  wordlabs.app  •  Root: 'tall' = great height, high stature</a:t>
+              <a:t>Word Labs  •  wordlabs.app  •  Root: 'tall' = high in stature or height</a:t>
             </a:r>
             <a:endParaRPr lang="en-US" sz="800" dirty="0"/>
           </a:p>
@@ -22198,7 +22132,7 @@
                 <a:ea typeface="Trebuchet MS" pitchFamily="34" charset="-122"/>
                 <a:cs typeface="Trebuchet MS" pitchFamily="34" charset="-120"/>
               </a:rPr>
-              <a:t>tallness</a:t>
+              <a:t>taller</a:t>
             </a:r>
             <a:endParaRPr lang="en-US" sz="2800" dirty="0"/>
           </a:p>
@@ -22886,7 +22820,7 @@
                 <a:ea typeface="Calibri" pitchFamily="34" charset="-122"/>
                 <a:cs typeface="Calibri" pitchFamily="34" charset="-120"/>
               </a:rPr>
-              <a:t>Word Labs  •  wordlabs.app  •  Root: 'tall' = great height, high stature</a:t>
+              <a:t>Word Labs  •  wordlabs.app  •  Root: 'tall' = high in stature or height</a:t>
             </a:r>
             <a:endParaRPr lang="en-US" sz="800" dirty="0"/>
           </a:p>
@@ -23025,7 +22959,7 @@
                 <a:ea typeface="Trebuchet MS" pitchFamily="34" charset="-122"/>
                 <a:cs typeface="Trebuchet MS" pitchFamily="34" charset="-120"/>
               </a:rPr>
-              <a:t>tallness</a:t>
+              <a:t>taller</a:t>
             </a:r>
             <a:endParaRPr lang="en-US" sz="2800" dirty="0"/>
           </a:p>
@@ -23203,7 +23137,7 @@
                 <a:ea typeface="Calibri" pitchFamily="34" charset="-122"/>
                 <a:cs typeface="Calibri" pitchFamily="34" charset="-120"/>
               </a:rPr>
-              <a:t>great height</a:t>
+              <a:t>high in stature or height</a:t>
             </a:r>
             <a:endParaRPr lang="en-US" sz="850" dirty="0"/>
           </a:p>
@@ -23276,7 +23210,7 @@
                 <a:ea typeface="Trebuchet MS" pitchFamily="34" charset="-122"/>
                 <a:cs typeface="Trebuchet MS" pitchFamily="34" charset="-120"/>
               </a:rPr>
-              <a:t>ness</a:t>
+              <a:t>er</a:t>
             </a:r>
             <a:endParaRPr lang="en-US" sz="1300" dirty="0"/>
           </a:p>
@@ -23315,7 +23249,7 @@
                 <a:ea typeface="Calibri" pitchFamily="34" charset="-122"/>
                 <a:cs typeface="Calibri" pitchFamily="34" charset="-120"/>
               </a:rPr>
-              <a:t>state or quality of</a:t>
+              <a:t>more</a:t>
             </a:r>
             <a:endParaRPr lang="en-US" sz="850" dirty="0"/>
           </a:p>
@@ -23871,7 +23805,7 @@
                 <a:ea typeface="Calibri" pitchFamily="34" charset="-122"/>
                 <a:cs typeface="Calibri" pitchFamily="34" charset="-120"/>
               </a:rPr>
-              <a:t>Word Labs  •  wordlabs.app  •  Root: 'tall' = great height, high stature</a:t>
+              <a:t>Word Labs  •  wordlabs.app  •  Root: 'tall' = high in stature or height</a:t>
             </a:r>
             <a:endParaRPr lang="en-US" sz="800" dirty="0"/>
           </a:p>
@@ -23944,7 +23878,7 @@
                 <a:ea typeface="Trebuchet MS" pitchFamily="34" charset="-122"/>
                 <a:cs typeface="Trebuchet MS" pitchFamily="34" charset="-120"/>
               </a:rPr>
-              <a:t>We are learning that the root 'tall' means 'great height, high stature'.</a:t>
+              <a:t>We are learning that the root 'tall' means 'high in stature or height'.</a:t>
             </a:r>
             <a:endParaRPr lang="en-US" sz="2000" dirty="0"/>
           </a:p>
@@ -24590,7 +24524,7 @@
                 <a:ea typeface="Calibri" pitchFamily="34" charset="-122"/>
                 <a:cs typeface="Calibri" pitchFamily="34" charset="-120"/>
               </a:rPr>
-              <a:t>Word Labs  •  wordlabs.app  •  Root: 'tall' = great height, high stature</a:t>
+              <a:t>Word Labs  •  wordlabs.app  •  Root: 'tall' = high in stature or height</a:t>
             </a:r>
             <a:endParaRPr lang="en-US" sz="800" dirty="0"/>
           </a:p>
@@ -24729,7 +24663,7 @@
                 <a:ea typeface="Trebuchet MS" pitchFamily="34" charset="-122"/>
                 <a:cs typeface="Trebuchet MS" pitchFamily="34" charset="-120"/>
               </a:rPr>
-              <a:t>tallness</a:t>
+              <a:t>taller</a:t>
             </a:r>
             <a:endParaRPr lang="en-US" sz="2800" dirty="0"/>
           </a:p>
@@ -24907,7 +24841,7 @@
                 <a:ea typeface="Calibri" pitchFamily="34" charset="-122"/>
                 <a:cs typeface="Calibri" pitchFamily="34" charset="-120"/>
               </a:rPr>
-              <a:t>great height</a:t>
+              <a:t>high in stature or height</a:t>
             </a:r>
             <a:endParaRPr lang="en-US" sz="850" dirty="0"/>
           </a:p>
@@ -24980,7 +24914,7 @@
                 <a:ea typeface="Trebuchet MS" pitchFamily="34" charset="-122"/>
                 <a:cs typeface="Trebuchet MS" pitchFamily="34" charset="-120"/>
               </a:rPr>
-              <a:t>ness</a:t>
+              <a:t>er</a:t>
             </a:r>
             <a:endParaRPr lang="en-US" sz="1300" dirty="0"/>
           </a:p>
@@ -25019,7 +24953,7 @@
                 <a:ea typeface="Calibri" pitchFamily="34" charset="-122"/>
                 <a:cs typeface="Calibri" pitchFamily="34" charset="-120"/>
               </a:rPr>
-              <a:t>state or quality of</a:t>
+              <a:t>more</a:t>
             </a:r>
             <a:endParaRPr lang="en-US" sz="850" dirty="0"/>
           </a:p>
@@ -25283,7 +25217,7 @@
                 <a:ea typeface="Trebuchet MS" pitchFamily="34" charset="-122"/>
                 <a:cs typeface="Trebuchet MS" pitchFamily="34" charset="-120"/>
               </a:rPr>
-              <a:t>ness</a:t>
+              <a:t>er</a:t>
             </a:r>
             <a:endParaRPr lang="en-US" sz="1400" dirty="0"/>
           </a:p>
@@ -25707,7 +25641,7 @@
                 <a:ea typeface="Calibri" pitchFamily="34" charset="-122"/>
                 <a:cs typeface="Calibri" pitchFamily="34" charset="-120"/>
               </a:rPr>
-              <a:t>Word Labs  •  wordlabs.app  •  Root: 'tall' = great height, high stature</a:t>
+              <a:t>Word Labs  •  wordlabs.app  •  Root: 'tall' = high in stature or height</a:t>
             </a:r>
             <a:endParaRPr lang="en-US" sz="800" dirty="0"/>
           </a:p>
@@ -25846,7 +25780,7 @@
                 <a:ea typeface="Trebuchet MS" pitchFamily="34" charset="-122"/>
                 <a:cs typeface="Trebuchet MS" pitchFamily="34" charset="-120"/>
               </a:rPr>
-              <a:t>tallness</a:t>
+              <a:t>taller</a:t>
             </a:r>
             <a:endParaRPr lang="en-US" sz="2800" dirty="0"/>
           </a:p>
@@ -26024,7 +25958,7 @@
                 <a:ea typeface="Calibri" pitchFamily="34" charset="-122"/>
                 <a:cs typeface="Calibri" pitchFamily="34" charset="-120"/>
               </a:rPr>
-              <a:t>great height</a:t>
+              <a:t>high in stature or height</a:t>
             </a:r>
             <a:endParaRPr lang="en-US" sz="850" dirty="0"/>
           </a:p>
@@ -26097,7 +26031,7 @@
                 <a:ea typeface="Trebuchet MS" pitchFamily="34" charset="-122"/>
                 <a:cs typeface="Trebuchet MS" pitchFamily="34" charset="-120"/>
               </a:rPr>
-              <a:t>ness</a:t>
+              <a:t>er</a:t>
             </a:r>
             <a:endParaRPr lang="en-US" sz="1300" dirty="0"/>
           </a:p>
@@ -26136,7 +26070,7 @@
                 <a:ea typeface="Calibri" pitchFamily="34" charset="-122"/>
                 <a:cs typeface="Calibri" pitchFamily="34" charset="-120"/>
               </a:rPr>
-              <a:t>state or quality of</a:t>
+              <a:t>more</a:t>
             </a:r>
             <a:endParaRPr lang="en-US" sz="850" dirty="0"/>
           </a:p>
@@ -26400,7 +26334,7 @@
                 <a:ea typeface="Trebuchet MS" pitchFamily="34" charset="-122"/>
                 <a:cs typeface="Trebuchet MS" pitchFamily="34" charset="-120"/>
               </a:rPr>
-              <a:t>ness</a:t>
+              <a:t>er</a:t>
             </a:r>
             <a:endParaRPr lang="en-US" sz="1400" dirty="0"/>
           </a:p>
@@ -26507,7 +26441,7 @@
         </p:nvSpPr>
         <p:spPr>
           <a:xfrm>
-            <a:off x="2254649" y="4169664"/>
+            <a:off x="2670048" y="4169664"/>
             <a:ext cx="685800" cy="475488"/>
           </a:xfrm>
           <a:prstGeom prst="rect">
@@ -26534,7 +26468,7 @@
         </p:nvSpPr>
         <p:spPr>
           <a:xfrm>
-            <a:off x="2254649" y="4169664"/>
+            <a:off x="2670048" y="4169664"/>
             <a:ext cx="685800" cy="475488"/>
           </a:xfrm>
           <a:prstGeom prst="rect">
@@ -26573,7 +26507,7 @@
         </p:nvSpPr>
         <p:spPr>
           <a:xfrm>
-            <a:off x="3293146" y="4169664"/>
+            <a:off x="4123944" y="4169664"/>
             <a:ext cx="685800" cy="475488"/>
           </a:xfrm>
           <a:prstGeom prst="rect">
@@ -26600,7 +26534,7 @@
         </p:nvSpPr>
         <p:spPr>
           <a:xfrm>
-            <a:off x="3293146" y="4169664"/>
+            <a:off x="4123944" y="4169664"/>
             <a:ext cx="685800" cy="475488"/>
           </a:xfrm>
           <a:prstGeom prst="rect">
@@ -26639,7 +26573,7 @@
         </p:nvSpPr>
         <p:spPr>
           <a:xfrm>
-            <a:off x="4331643" y="4169664"/>
+            <a:off x="5577840" y="4169664"/>
             <a:ext cx="685800" cy="475488"/>
           </a:xfrm>
           <a:prstGeom prst="rect">
@@ -26666,7 +26600,7 @@
         </p:nvSpPr>
         <p:spPr>
           <a:xfrm>
-            <a:off x="4331643" y="4169664"/>
+            <a:off x="5577840" y="4169664"/>
             <a:ext cx="685800" cy="475488"/>
           </a:xfrm>
           <a:prstGeom prst="rect">
@@ -26705,7 +26639,7 @@
         </p:nvSpPr>
         <p:spPr>
           <a:xfrm>
-            <a:off x="5370141" y="4169664"/>
+            <a:off x="7031736" y="4169664"/>
             <a:ext cx="685800" cy="475488"/>
           </a:xfrm>
           <a:prstGeom prst="rect">
@@ -26732,7 +26666,7 @@
         </p:nvSpPr>
         <p:spPr>
           <a:xfrm>
-            <a:off x="5370141" y="4169664"/>
+            <a:off x="7031736" y="4169664"/>
             <a:ext cx="685800" cy="475488"/>
           </a:xfrm>
           <a:prstGeom prst="rect">
@@ -26757,139 +26691,7 @@
                 <a:ea typeface="Trebuchet MS" pitchFamily="34" charset="-122"/>
                 <a:cs typeface="Trebuchet MS" pitchFamily="34" charset="-120"/>
               </a:rPr>
-              <a:t>n</a:t>
-            </a:r>
-            <a:endParaRPr lang="en-US" sz="900" dirty="0"/>
-          </a:p>
-        </p:txBody>
-      </p:sp>
-      <p:sp>
-        <p:nvSpPr>
-          <p:cNvPr id="41" name="Shape 39"/>
-          <p:cNvSpPr/>
-          <p:nvPr/>
-        </p:nvSpPr>
-        <p:spPr>
-          <a:xfrm>
-            <a:off x="6408638" y="4169664"/>
-            <a:ext cx="685800" cy="475488"/>
-          </a:xfrm>
-          <a:prstGeom prst="rect">
-            <a:avLst>
-              <a:gd name="adj" fmla="val 7692"/>
-            </a:avLst>
-          </a:prstGeom>
-          <a:solidFill>
-            <a:srgbClr val="FFFFFF"/>
-          </a:solidFill>
-          <a:ln w="12700">
-            <a:solidFill>
-              <a:srgbClr val="DB2777"/>
-            </a:solidFill>
-            <a:prstDash val="solid"/>
-          </a:ln>
-        </p:spPr>
-      </p:sp>
-      <p:sp>
-        <p:nvSpPr>
-          <p:cNvPr id="42" name="Text 40"/>
-          <p:cNvSpPr/>
-          <p:nvPr/>
-        </p:nvSpPr>
-        <p:spPr>
-          <a:xfrm>
-            <a:off x="6408638" y="4169664"/>
-            <a:ext cx="685800" cy="475488"/>
-          </a:xfrm>
-          <a:prstGeom prst="rect">
-            <a:avLst/>
-          </a:prstGeom>
-          <a:noFill/>
-          <a:ln/>
-        </p:spPr>
-        <p:txBody>
-          <a:bodyPr wrap="square" lIns="0" tIns="0" rIns="0" bIns="0" rtlCol="0" anchor="ctr"/>
-          <a:lstStyle/>
-          <a:p>
-            <a:pPr algn="ctr" indent="0" marL="0">
-              <a:buNone/>
-            </a:pPr>
-            <a:r>
-              <a:rPr lang="en-US" sz="900" b="1" dirty="0">
-                <a:solidFill>
-                  <a:srgbClr val="9D174D"/>
-                </a:solidFill>
-                <a:latin typeface="Trebuchet MS" pitchFamily="34" charset="0"/>
-                <a:ea typeface="Trebuchet MS" pitchFamily="34" charset="-122"/>
-                <a:cs typeface="Trebuchet MS" pitchFamily="34" charset="-120"/>
-              </a:rPr>
-              <a:t>e</a:t>
-            </a:r>
-            <a:endParaRPr lang="en-US" sz="900" dirty="0"/>
-          </a:p>
-        </p:txBody>
-      </p:sp>
-      <p:sp>
-        <p:nvSpPr>
-          <p:cNvPr id="43" name="Shape 41"/>
-          <p:cNvSpPr/>
-          <p:nvPr/>
-        </p:nvSpPr>
-        <p:spPr>
-          <a:xfrm>
-            <a:off x="7447135" y="4169664"/>
-            <a:ext cx="685800" cy="475488"/>
-          </a:xfrm>
-          <a:prstGeom prst="rect">
-            <a:avLst>
-              <a:gd name="adj" fmla="val 7692"/>
-            </a:avLst>
-          </a:prstGeom>
-          <a:solidFill>
-            <a:srgbClr val="FFFFFF"/>
-          </a:solidFill>
-          <a:ln w="12700">
-            <a:solidFill>
-              <a:srgbClr val="DB2777"/>
-            </a:solidFill>
-            <a:prstDash val="solid"/>
-          </a:ln>
-        </p:spPr>
-      </p:sp>
-      <p:sp>
-        <p:nvSpPr>
-          <p:cNvPr id="44" name="Text 42"/>
-          <p:cNvSpPr/>
-          <p:nvPr/>
-        </p:nvSpPr>
-        <p:spPr>
-          <a:xfrm>
-            <a:off x="7447135" y="4169664"/>
-            <a:ext cx="685800" cy="475488"/>
-          </a:xfrm>
-          <a:prstGeom prst="rect">
-            <a:avLst/>
-          </a:prstGeom>
-          <a:noFill/>
-          <a:ln/>
-        </p:spPr>
-        <p:txBody>
-          <a:bodyPr wrap="square" lIns="0" tIns="0" rIns="0" bIns="0" rtlCol="0" anchor="ctr"/>
-          <a:lstStyle/>
-          <a:p>
-            <a:pPr algn="ctr" indent="0" marL="0">
-              <a:buNone/>
-            </a:pPr>
-            <a:r>
-              <a:rPr lang="en-US" sz="900" b="1" dirty="0">
-                <a:solidFill>
-                  <a:srgbClr val="9D174D"/>
-                </a:solidFill>
-                <a:latin typeface="Trebuchet MS" pitchFamily="34" charset="0"/>
-                <a:ea typeface="Trebuchet MS" pitchFamily="34" charset="-122"/>
-                <a:cs typeface="Trebuchet MS" pitchFamily="34" charset="-120"/>
-              </a:rPr>
-              <a:t>ss</a:t>
+              <a:t>er</a:t>
             </a:r>
             <a:endParaRPr lang="en-US" sz="900" dirty="0"/>
           </a:p>
@@ -27181,7 +26983,7 @@
                 <a:ea typeface="Calibri" pitchFamily="34" charset="-122"/>
                 <a:cs typeface="Calibri" pitchFamily="34" charset="-120"/>
               </a:rPr>
-              <a:t>Word Labs  •  wordlabs.app  •  Root: 'tall' = great height, high stature</a:t>
+              <a:t>Word Labs  •  wordlabs.app  •  Root: 'tall' = high in stature or height</a:t>
             </a:r>
             <a:endParaRPr lang="en-US" sz="800" dirty="0"/>
           </a:p>
@@ -27320,7 +27122,7 @@
                 <a:ea typeface="Trebuchet MS" pitchFamily="34" charset="-122"/>
                 <a:cs typeface="Trebuchet MS" pitchFamily="34" charset="-120"/>
               </a:rPr>
-              <a:t>tallish</a:t>
+              <a:t>tallboy</a:t>
             </a:r>
             <a:endParaRPr lang="en-US" sz="2800" dirty="0"/>
           </a:p>
@@ -28008,7 +27810,7 @@
                 <a:ea typeface="Calibri" pitchFamily="34" charset="-122"/>
                 <a:cs typeface="Calibri" pitchFamily="34" charset="-120"/>
               </a:rPr>
-              <a:t>Word Labs  •  wordlabs.app  •  Root: 'tall' = great height, high stature</a:t>
+              <a:t>Word Labs  •  wordlabs.app  •  Root: 'tall' = high in stature or height</a:t>
             </a:r>
             <a:endParaRPr lang="en-US" sz="800" dirty="0"/>
           </a:p>
@@ -28147,7 +27949,7 @@
                 <a:ea typeface="Trebuchet MS" pitchFamily="34" charset="-122"/>
                 <a:cs typeface="Trebuchet MS" pitchFamily="34" charset="-120"/>
               </a:rPr>
-              <a:t>tallish</a:t>
+              <a:t>tallboy</a:t>
             </a:r>
             <a:endParaRPr lang="en-US" sz="2800" dirty="0"/>
           </a:p>
@@ -28325,7 +28127,7 @@
                 <a:ea typeface="Calibri" pitchFamily="34" charset="-122"/>
                 <a:cs typeface="Calibri" pitchFamily="34" charset="-120"/>
               </a:rPr>
-              <a:t>great height</a:t>
+              <a:t>high in stature or height</a:t>
             </a:r>
             <a:endParaRPr lang="en-US" sz="850" dirty="0"/>
           </a:p>
@@ -28398,7 +28200,7 @@
                 <a:ea typeface="Trebuchet MS" pitchFamily="34" charset="-122"/>
                 <a:cs typeface="Trebuchet MS" pitchFamily="34" charset="-120"/>
               </a:rPr>
-              <a:t>ish</a:t>
+              <a:t>boy</a:t>
             </a:r>
             <a:endParaRPr lang="en-US" sz="1300" dirty="0"/>
           </a:p>
@@ -28437,7 +28239,7 @@
                 <a:ea typeface="Calibri" pitchFamily="34" charset="-122"/>
                 <a:cs typeface="Calibri" pitchFamily="34" charset="-120"/>
               </a:rPr>
-              <a:t>somewhat, rather</a:t>
+              <a:t>a young male; here used as a compound element meaning a type of tall furniture</a:t>
             </a:r>
             <a:endParaRPr lang="en-US" sz="850" dirty="0"/>
           </a:p>
@@ -28993,7 +28795,7 @@
                 <a:ea typeface="Calibri" pitchFamily="34" charset="-122"/>
                 <a:cs typeface="Calibri" pitchFamily="34" charset="-120"/>
               </a:rPr>
-              <a:t>Word Labs  •  wordlabs.app  •  Root: 'tall' = great height, high stature</a:t>
+              <a:t>Word Labs  •  wordlabs.app  •  Root: 'tall' = high in stature or height</a:t>
             </a:r>
             <a:endParaRPr lang="en-US" sz="800" dirty="0"/>
           </a:p>
@@ -29132,7 +28934,7 @@
                 <a:ea typeface="Trebuchet MS" pitchFamily="34" charset="-122"/>
                 <a:cs typeface="Trebuchet MS" pitchFamily="34" charset="-120"/>
               </a:rPr>
-              <a:t>tallish</a:t>
+              <a:t>tallboy</a:t>
             </a:r>
             <a:endParaRPr lang="en-US" sz="2800" dirty="0"/>
           </a:p>
@@ -29310,7 +29112,7 @@
                 <a:ea typeface="Calibri" pitchFamily="34" charset="-122"/>
                 <a:cs typeface="Calibri" pitchFamily="34" charset="-120"/>
               </a:rPr>
-              <a:t>great height</a:t>
+              <a:t>high in stature or height</a:t>
             </a:r>
             <a:endParaRPr lang="en-US" sz="850" dirty="0"/>
           </a:p>
@@ -29383,7 +29185,7 @@
                 <a:ea typeface="Trebuchet MS" pitchFamily="34" charset="-122"/>
                 <a:cs typeface="Trebuchet MS" pitchFamily="34" charset="-120"/>
               </a:rPr>
-              <a:t>ish</a:t>
+              <a:t>boy</a:t>
             </a:r>
             <a:endParaRPr lang="en-US" sz="1300" dirty="0"/>
           </a:p>
@@ -29422,7 +29224,7 @@
                 <a:ea typeface="Calibri" pitchFamily="34" charset="-122"/>
                 <a:cs typeface="Calibri" pitchFamily="34" charset="-120"/>
               </a:rPr>
-              <a:t>somewhat, rather</a:t>
+              <a:t>a young male; here used as a compound element meaning a type of tall furniture</a:t>
             </a:r>
             <a:endParaRPr lang="en-US" sz="850" dirty="0"/>
           </a:p>
@@ -29686,7 +29488,7 @@
                 <a:ea typeface="Trebuchet MS" pitchFamily="34" charset="-122"/>
                 <a:cs typeface="Trebuchet MS" pitchFamily="34" charset="-120"/>
               </a:rPr>
-              <a:t>ish</a:t>
+              <a:t>boy</a:t>
             </a:r>
             <a:endParaRPr lang="en-US" sz="1400" dirty="0"/>
           </a:p>
@@ -30110,7 +29912,7 @@
                 <a:ea typeface="Calibri" pitchFamily="34" charset="-122"/>
                 <a:cs typeface="Calibri" pitchFamily="34" charset="-120"/>
               </a:rPr>
-              <a:t>Word Labs  •  wordlabs.app  •  Root: 'tall' = great height, high stature</a:t>
+              <a:t>Word Labs  •  wordlabs.app  •  Root: 'tall' = high in stature or height</a:t>
             </a:r>
             <a:endParaRPr lang="en-US" sz="800" dirty="0"/>
           </a:p>
@@ -30249,7 +30051,7 @@
                 <a:ea typeface="Trebuchet MS" pitchFamily="34" charset="-122"/>
                 <a:cs typeface="Trebuchet MS" pitchFamily="34" charset="-120"/>
               </a:rPr>
-              <a:t>tallish</a:t>
+              <a:t>tallboy</a:t>
             </a:r>
             <a:endParaRPr lang="en-US" sz="2800" dirty="0"/>
           </a:p>
@@ -30427,7 +30229,7 @@
                 <a:ea typeface="Calibri" pitchFamily="34" charset="-122"/>
                 <a:cs typeface="Calibri" pitchFamily="34" charset="-120"/>
               </a:rPr>
-              <a:t>great height</a:t>
+              <a:t>high in stature or height</a:t>
             </a:r>
             <a:endParaRPr lang="en-US" sz="850" dirty="0"/>
           </a:p>
@@ -30500,7 +30302,7 @@
                 <a:ea typeface="Trebuchet MS" pitchFamily="34" charset="-122"/>
                 <a:cs typeface="Trebuchet MS" pitchFamily="34" charset="-120"/>
               </a:rPr>
-              <a:t>ish</a:t>
+              <a:t>boy</a:t>
             </a:r>
             <a:endParaRPr lang="en-US" sz="1300" dirty="0"/>
           </a:p>
@@ -30539,7 +30341,7 @@
                 <a:ea typeface="Calibri" pitchFamily="34" charset="-122"/>
                 <a:cs typeface="Calibri" pitchFamily="34" charset="-120"/>
               </a:rPr>
-              <a:t>somewhat, rather</a:t>
+              <a:t>a young male; here used as a compound element meaning a type of tall furniture</a:t>
             </a:r>
             <a:endParaRPr lang="en-US" sz="850" dirty="0"/>
           </a:p>
@@ -30803,7 +30605,7 @@
                 <a:ea typeface="Trebuchet MS" pitchFamily="34" charset="-122"/>
                 <a:cs typeface="Trebuchet MS" pitchFamily="34" charset="-120"/>
               </a:rPr>
-              <a:t>ish</a:t>
+              <a:t>boy</a:t>
             </a:r>
             <a:endParaRPr lang="en-US" sz="1400" dirty="0"/>
           </a:p>
@@ -31160,7 +30962,7 @@
                 <a:ea typeface="Trebuchet MS" pitchFamily="34" charset="-122"/>
                 <a:cs typeface="Trebuchet MS" pitchFamily="34" charset="-120"/>
               </a:rPr>
-              <a:t>i</a:t>
+              <a:t>b</a:t>
             </a:r>
             <a:endParaRPr lang="en-US" sz="900" dirty="0"/>
           </a:p>
@@ -31226,7 +31028,7 @@
                 <a:ea typeface="Trebuchet MS" pitchFamily="34" charset="-122"/>
                 <a:cs typeface="Trebuchet MS" pitchFamily="34" charset="-120"/>
               </a:rPr>
-              <a:t>sh</a:t>
+              <a:t>oy</a:t>
             </a:r>
             <a:endParaRPr lang="en-US" sz="900" dirty="0"/>
           </a:p>
@@ -31518,7 +31320,7 @@
                 <a:ea typeface="Calibri" pitchFamily="34" charset="-122"/>
                 <a:cs typeface="Calibri" pitchFamily="34" charset="-120"/>
               </a:rPr>
-              <a:t>Word Labs  •  wordlabs.app  •  Root: 'tall' = great height, high stature</a:t>
+              <a:t>Word Labs  •  wordlabs.app  •  Root: 'tall' = high in stature or height</a:t>
             </a:r>
             <a:endParaRPr lang="en-US" sz="800" dirty="0"/>
           </a:p>
@@ -32687,7 +32489,7 @@
                 <a:ea typeface="Calibri" pitchFamily="34" charset="-122"/>
                 <a:cs typeface="Calibri" pitchFamily="34" charset="-120"/>
               </a:rPr>
-              <a:t>Word Labs  •  wordlabs.app  •  Root: 'tall' = great height, high stature</a:t>
+              <a:t>Word Labs  •  wordlabs.app  •  Root: 'tall' = high in stature or height</a:t>
             </a:r>
             <a:endParaRPr lang="en-US" sz="800" dirty="0"/>
           </a:p>
@@ -32988,7 +32790,7 @@
                 <a:ea typeface="Trebuchet MS" pitchFamily="34" charset="-122"/>
                 <a:cs typeface="Trebuchet MS" pitchFamily="34" charset="-120"/>
               </a:rPr>
-              <a:t>fore-</a:t>
+              <a:t>in-</a:t>
             </a:r>
             <a:endParaRPr lang="en-US" sz="1300" dirty="0"/>
           </a:p>
@@ -33180,7 +32982,7 @@
                 <a:ea typeface="Trebuchet MS" pitchFamily="34" charset="-122"/>
                 <a:cs typeface="Trebuchet MS" pitchFamily="34" charset="-120"/>
               </a:rPr>
-              <a:t>out-</a:t>
+              <a:t>un-</a:t>
             </a:r>
             <a:endParaRPr lang="en-US" sz="1300" dirty="0"/>
           </a:p>
@@ -33333,7 +33135,7 @@
                 <a:ea typeface="Trebuchet MS" pitchFamily="34" charset="-122"/>
                 <a:cs typeface="Trebuchet MS" pitchFamily="34" charset="-120"/>
               </a:rPr>
-              <a:t>over-</a:t>
+              <a:t>be-</a:t>
             </a:r>
             <a:endParaRPr lang="en-US" sz="1300" dirty="0"/>
           </a:p>
@@ -33422,7 +33224,7 @@
                 <a:ea typeface="Trebuchet MS" pitchFamily="34" charset="-122"/>
                 <a:cs typeface="Trebuchet MS" pitchFamily="34" charset="-120"/>
               </a:rPr>
-              <a:t>-ish</a:t>
+              <a:t>-ness</a:t>
             </a:r>
             <a:endParaRPr lang="en-US" sz="1300" dirty="0"/>
           </a:p>
@@ -33486,7 +33288,7 @@
                 <a:ea typeface="Trebuchet MS" pitchFamily="34" charset="-122"/>
                 <a:cs typeface="Trebuchet MS" pitchFamily="34" charset="-120"/>
               </a:rPr>
-              <a:t>up-</a:t>
+              <a:t>over-</a:t>
             </a:r>
             <a:endParaRPr lang="en-US" sz="1300" dirty="0"/>
           </a:p>
@@ -33575,7 +33377,7 @@
                 <a:ea typeface="Trebuchet MS" pitchFamily="34" charset="-122"/>
                 <a:cs typeface="Trebuchet MS" pitchFamily="34" charset="-120"/>
               </a:rPr>
-              <a:t>-ness</a:t>
+              <a:t>-ish</a:t>
             </a:r>
             <a:endParaRPr lang="en-US" sz="1300" dirty="0"/>
           </a:p>
@@ -33639,7 +33441,7 @@
                 <a:ea typeface="Trebuchet MS" pitchFamily="34" charset="-122"/>
                 <a:cs typeface="Trebuchet MS" pitchFamily="34" charset="-120"/>
               </a:rPr>
-              <a:t>short-</a:t>
+              <a:t>fore-</a:t>
             </a:r>
             <a:endParaRPr lang="en-US" sz="1300" dirty="0"/>
           </a:p>
@@ -33728,7 +33530,7 @@
                 <a:ea typeface="Trebuchet MS" pitchFamily="34" charset="-122"/>
                 <a:cs typeface="Trebuchet MS" pitchFamily="34" charset="-120"/>
               </a:rPr>
-              <a:t>-y</a:t>
+              <a:t>-ly</a:t>
             </a:r>
             <a:endParaRPr lang="en-US" sz="1300" dirty="0"/>
           </a:p>
@@ -33833,7 +33635,7 @@
                 <a:ea typeface="Trebuchet MS" pitchFamily="34" charset="-122"/>
                 <a:cs typeface="Trebuchet MS" pitchFamily="34" charset="-120"/>
               </a:rPr>
-              <a:t>tall</a:t>
+              <a:t>taller</a:t>
             </a:r>
             <a:endParaRPr lang="en-US" sz="1200" dirty="0"/>
           </a:p>
@@ -33899,7 +33701,7 @@
                 <a:ea typeface="Trebuchet MS" pitchFamily="34" charset="-122"/>
                 <a:cs typeface="Trebuchet MS" pitchFamily="34" charset="-120"/>
               </a:rPr>
-              <a:t>taller</a:t>
+              <a:t>tallest</a:t>
             </a:r>
             <a:endParaRPr lang="en-US" sz="1200" dirty="0"/>
           </a:p>
@@ -33965,7 +33767,7 @@
                 <a:ea typeface="Trebuchet MS" pitchFamily="34" charset="-122"/>
                 <a:cs typeface="Trebuchet MS" pitchFamily="34" charset="-120"/>
               </a:rPr>
-              <a:t>tallest</a:t>
+              <a:t>tallness</a:t>
             </a:r>
             <a:endParaRPr lang="en-US" sz="1200" dirty="0"/>
           </a:p>
@@ -34031,7 +33833,7 @@
                 <a:ea typeface="Trebuchet MS" pitchFamily="34" charset="-122"/>
                 <a:cs typeface="Trebuchet MS" pitchFamily="34" charset="-120"/>
               </a:rPr>
-              <a:t>tallness</a:t>
+              <a:t>tallish</a:t>
             </a:r>
             <a:endParaRPr lang="en-US" sz="1200" dirty="0"/>
           </a:p>
@@ -34097,7 +33899,7 @@
                 <a:ea typeface="Trebuchet MS" pitchFamily="34" charset="-122"/>
                 <a:cs typeface="Trebuchet MS" pitchFamily="34" charset="-120"/>
               </a:rPr>
-              <a:t>tallish</a:t>
+              <a:t>overtall</a:t>
             </a:r>
             <a:endParaRPr lang="en-US" sz="1200" dirty="0"/>
           </a:p>
@@ -34163,7 +33965,7 @@
                 <a:ea typeface="Trebuchet MS" pitchFamily="34" charset="-122"/>
                 <a:cs typeface="Trebuchet MS" pitchFamily="34" charset="-120"/>
               </a:rPr>
-              <a:t>overtall</a:t>
+              <a:t>tall</a:t>
             </a:r>
             <a:endParaRPr lang="en-US" sz="1200" dirty="0"/>
           </a:p>
@@ -34229,7 +34031,7 @@
                 <a:ea typeface="Trebuchet MS" pitchFamily="34" charset="-122"/>
                 <a:cs typeface="Trebuchet MS" pitchFamily="34" charset="-120"/>
               </a:rPr>
-              <a:t>outtall</a:t>
+              <a:t>tallboy</a:t>
             </a:r>
             <a:endParaRPr lang="en-US" sz="1200" dirty="0"/>
           </a:p>
@@ -34295,7 +34097,7 @@
                 <a:ea typeface="Trebuchet MS" pitchFamily="34" charset="-122"/>
                 <a:cs typeface="Trebuchet MS" pitchFamily="34" charset="-120"/>
               </a:rPr>
-              <a:t>tall-tale</a:t>
+              <a:t>untall</a:t>
             </a:r>
             <a:endParaRPr lang="en-US" sz="1200" dirty="0"/>
           </a:p>
@@ -34587,7 +34389,7 @@
                 <a:ea typeface="Calibri" pitchFamily="34" charset="-122"/>
                 <a:cs typeface="Calibri" pitchFamily="34" charset="-120"/>
               </a:rPr>
-              <a:t>Word Labs  •  wordlabs.app  •  Root: 'tall' = great height, high stature</a:t>
+              <a:t>Word Labs  •  wordlabs.app  •  Root: 'tall' = high in stature or height</a:t>
             </a:r>
             <a:endParaRPr lang="en-US" sz="800" dirty="0"/>
           </a:p>
@@ -34751,7 +34553,7 @@
                 <a:ea typeface="Calibri" pitchFamily="34" charset="-122"/>
                 <a:cs typeface="Calibri" pitchFamily="34" charset="-120"/>
               </a:rPr>
-              <a:t>The core part of a word carrying its basic meaning. For example, 'tall' means 'great height, high stature'.</a:t>
+              <a:t>The core part of a word carrying its basic meaning. For example, 'tall' means 'high in stature or height'.</a:t>
             </a:r>
             <a:endParaRPr lang="en-US" sz="1350" dirty="0"/>
           </a:p>
@@ -35371,7 +35173,7 @@
                 <a:ea typeface="Calibri" pitchFamily="34" charset="-122"/>
                 <a:cs typeface="Calibri" pitchFamily="34" charset="-120"/>
               </a:rPr>
-              <a:t>Word Labs  •  wordlabs.app  •  Root: 'tall' = great height, high stature</a:t>
+              <a:t>Word Labs  •  wordlabs.app  •  Root: 'tall' = high in stature or height</a:t>
             </a:r>
             <a:endParaRPr lang="en-US" sz="800" dirty="0"/>
           </a:p>
@@ -35483,7 +35285,7 @@
                 <a:ea typeface="Calibri" pitchFamily="34" charset="-122"/>
                 <a:cs typeface="Calibri" pitchFamily="34" charset="-120"/>
               </a:rPr>
-              <a:t>1.  The word 'tallest' uses the suffix '-est' to show the greatest degree of height.</a:t>
+              <a:t>1.  Adding '-ness' to 'tall' makes a noun meaning the quality of being tall.</a:t>
             </a:r>
             <a:endParaRPr lang="en-US" sz="1300" dirty="0"/>
           </a:p>
@@ -35622,7 +35424,7 @@
                 <a:ea typeface="Calibri" pitchFamily="34" charset="-122"/>
                 <a:cs typeface="Calibri" pitchFamily="34" charset="-120"/>
               </a:rPr>
-              <a:t>2.  The root 'tall' comes from the Latin language.</a:t>
+              <a:t>2.  The root 'tall' comes from a Greek word meaning strong.</a:t>
             </a:r>
             <a:endParaRPr lang="en-US" sz="1300" dirty="0"/>
           </a:p>
@@ -35761,7 +35563,7 @@
                 <a:ea typeface="Calibri" pitchFamily="34" charset="-122"/>
                 <a:cs typeface="Calibri" pitchFamily="34" charset="-120"/>
               </a:rPr>
-              <a:t>3.  'Tallness' is a noun formed by adding the suffix '-ness' to the root 'tall'.</a:t>
+              <a:t>3.  The word 'tallest' uses the suffix '-est' to mean the most tall.</a:t>
             </a:r>
             <a:endParaRPr lang="en-US" sz="1300" dirty="0"/>
           </a:p>
@@ -35900,7 +35702,7 @@
                 <a:ea typeface="Calibri" pitchFamily="34" charset="-122"/>
                 <a:cs typeface="Calibri" pitchFamily="34" charset="-120"/>
               </a:rPr>
-              <a:t>4.  The word 'tallish' means someone or something is somewhat tall.</a:t>
+              <a:t>4.  The suffix '-er' in 'taller' means the opposite of tall.</a:t>
             </a:r>
             <a:endParaRPr lang="en-US" sz="1300" dirty="0"/>
           </a:p>
@@ -35923,11 +35725,11 @@
             </a:avLst>
           </a:prstGeom>
           <a:solidFill>
-            <a:srgbClr val="DCFCE7"/>
-          </a:solidFill>
-          <a:ln w="12700">
-            <a:solidFill>
-              <a:srgbClr val="16A34A"/>
+            <a:srgbClr val="FEE2E2"/>
+          </a:solidFill>
+          <a:ln w="12700">
+            <a:solidFill>
+              <a:srgbClr val="DC2626"/>
             </a:solidFill>
             <a:prstDash val="solid"/>
           </a:ln>
@@ -35960,13 +35762,13 @@
             <a:r>
               <a:rPr lang="en-US" sz="1100" b="1" dirty="0">
                 <a:solidFill>
-                  <a:srgbClr val="16A34A"/>
+                  <a:srgbClr val="DC2626"/>
                 </a:solidFill>
                 <a:latin typeface="Trebuchet MS" pitchFamily="34" charset="0"/>
                 <a:ea typeface="Trebuchet MS" pitchFamily="34" charset="-122"/>
                 <a:cs typeface="Trebuchet MS" pitchFamily="34" charset="-120"/>
               </a:rPr>
-              <a:t>TRUE</a:t>
+              <a:t>FALSE</a:t>
             </a:r>
             <a:endParaRPr lang="en-US" sz="1100" dirty="0"/>
           </a:p>
@@ -36039,7 +35841,7 @@
                 <a:ea typeface="Calibri" pitchFamily="34" charset="-122"/>
                 <a:cs typeface="Calibri" pitchFamily="34" charset="-120"/>
               </a:rPr>
-              <a:t>5.  Adding the suffix '-er' to 'tall' makes a word that means extremely tall.</a:t>
+              <a:t>5.  The word 'tallish' means having some degree of tallness.</a:t>
             </a:r>
             <a:endParaRPr lang="en-US" sz="1300" dirty="0"/>
           </a:p>
@@ -36062,11 +35864,11 @@
             </a:avLst>
           </a:prstGeom>
           <a:solidFill>
-            <a:srgbClr val="FEE2E2"/>
-          </a:solidFill>
-          <a:ln w="12700">
-            <a:solidFill>
-              <a:srgbClr val="DC2626"/>
+            <a:srgbClr val="DCFCE7"/>
+          </a:solidFill>
+          <a:ln w="12700">
+            <a:solidFill>
+              <a:srgbClr val="16A34A"/>
             </a:solidFill>
             <a:prstDash val="solid"/>
           </a:ln>
@@ -36099,13 +35901,13 @@
             <a:r>
               <a:rPr lang="en-US" sz="1100" b="1" dirty="0">
                 <a:solidFill>
-                  <a:srgbClr val="DC2626"/>
+                  <a:srgbClr val="16A34A"/>
                 </a:solidFill>
                 <a:latin typeface="Trebuchet MS" pitchFamily="34" charset="0"/>
                 <a:ea typeface="Trebuchet MS" pitchFamily="34" charset="-122"/>
                 <a:cs typeface="Trebuchet MS" pitchFamily="34" charset="-120"/>
               </a:rPr>
-              <a:t>FALSE</a:t>
+              <a:t>TRUE</a:t>
             </a:r>
             <a:endParaRPr lang="en-US" sz="1100" dirty="0"/>
           </a:p>
@@ -36397,7 +36199,7 @@
                 <a:ea typeface="Calibri" pitchFamily="34" charset="-122"/>
                 <a:cs typeface="Calibri" pitchFamily="34" charset="-120"/>
               </a:rPr>
-              <a:t>Word Labs  •  wordlabs.app  •  Root: 'tall' = great height, high stature</a:t>
+              <a:t>Word Labs  •  wordlabs.app  •  Root: 'tall' = high in stature or height</a:t>
             </a:r>
             <a:endParaRPr lang="en-US" sz="800" dirty="0"/>
           </a:p>
@@ -36534,7 +36336,7 @@
                 <a:ea typeface="Trebuchet MS" pitchFamily="34" charset="-122"/>
                 <a:cs typeface="Trebuchet MS" pitchFamily="34" charset="-120"/>
               </a:rPr>
-              <a:t>great height, high stature</a:t>
+              <a:t>high in stature or height</a:t>
             </a:r>
             <a:endParaRPr lang="en-US" sz="2000" dirty="0"/>
           </a:p>
@@ -36573,7 +36375,7 @@
                 <a:ea typeface="Calibri" pitchFamily="34" charset="-122"/>
                 <a:cs typeface="Calibri" pitchFamily="34" charset="-120"/>
               </a:rPr>
-              <a:t>Origin: Old English: getæl</a:t>
+              <a:t>Origin: Latin: talius</a:t>
             </a:r>
             <a:endParaRPr lang="en-US" sz="1100" dirty="0"/>
           </a:p>
@@ -36678,7 +36480,7 @@
                 <a:ea typeface="Trebuchet MS" pitchFamily="34" charset="-122"/>
                 <a:cs typeface="Trebuchet MS" pitchFamily="34" charset="-120"/>
               </a:rPr>
-              <a:t>tall</a:t>
+              <a:t>taller</a:t>
             </a:r>
             <a:endParaRPr lang="en-US" sz="1300" dirty="0"/>
           </a:p>
@@ -36744,7 +36546,7 @@
                 <a:ea typeface="Trebuchet MS" pitchFamily="34" charset="-122"/>
                 <a:cs typeface="Trebuchet MS" pitchFamily="34" charset="-120"/>
               </a:rPr>
-              <a:t>taller</a:t>
+              <a:t>tallest</a:t>
             </a:r>
             <a:endParaRPr lang="en-US" sz="1300" dirty="0"/>
           </a:p>
@@ -36810,7 +36612,7 @@
                 <a:ea typeface="Trebuchet MS" pitchFamily="34" charset="-122"/>
                 <a:cs typeface="Trebuchet MS" pitchFamily="34" charset="-120"/>
               </a:rPr>
-              <a:t>tallest</a:t>
+              <a:t>tallness</a:t>
             </a:r>
             <a:endParaRPr lang="en-US" sz="1300" dirty="0"/>
           </a:p>
@@ -36876,7 +36678,7 @@
                 <a:ea typeface="Trebuchet MS" pitchFamily="34" charset="-122"/>
                 <a:cs typeface="Trebuchet MS" pitchFamily="34" charset="-120"/>
               </a:rPr>
-              <a:t>tallness</a:t>
+              <a:t>tallish</a:t>
             </a:r>
             <a:endParaRPr lang="en-US" sz="1300" dirty="0"/>
           </a:p>
@@ -36942,7 +36744,7 @@
                 <a:ea typeface="Trebuchet MS" pitchFamily="34" charset="-122"/>
                 <a:cs typeface="Trebuchet MS" pitchFamily="34" charset="-120"/>
               </a:rPr>
-              <a:t>tallish</a:t>
+              <a:t>overtall</a:t>
             </a:r>
             <a:endParaRPr lang="en-US" sz="1300" dirty="0"/>
           </a:p>
@@ -37008,7 +36810,7 @@
                 <a:ea typeface="Trebuchet MS" pitchFamily="34" charset="-122"/>
                 <a:cs typeface="Trebuchet MS" pitchFamily="34" charset="-120"/>
               </a:rPr>
-              <a:t>overtall</a:t>
+              <a:t>tall</a:t>
             </a:r>
             <a:endParaRPr lang="en-US" sz="1300" dirty="0"/>
           </a:p>
@@ -37074,7 +36876,7 @@
                 <a:ea typeface="Trebuchet MS" pitchFamily="34" charset="-122"/>
                 <a:cs typeface="Trebuchet MS" pitchFamily="34" charset="-120"/>
               </a:rPr>
-              <a:t>outtall</a:t>
+              <a:t>tallboy</a:t>
             </a:r>
             <a:endParaRPr lang="en-US" sz="1300" dirty="0"/>
           </a:p>
@@ -37366,7 +37168,7 @@
                 <a:ea typeface="Calibri" pitchFamily="34" charset="-122"/>
                 <a:cs typeface="Calibri" pitchFamily="34" charset="-120"/>
               </a:rPr>
-              <a:t>Word Labs  •  wordlabs.app  •  Root: 'tall' = great height, high stature</a:t>
+              <a:t>Word Labs  •  wordlabs.app  •  Root: 'tall' = high in stature or height</a:t>
             </a:r>
             <a:endParaRPr lang="en-US" sz="800" dirty="0"/>
           </a:p>
@@ -37667,7 +37469,7 @@
                 <a:ea typeface="Trebuchet MS" pitchFamily="34" charset="-122"/>
                 <a:cs typeface="Trebuchet MS" pitchFamily="34" charset="-120"/>
               </a:rPr>
-              <a:t>fore-</a:t>
+              <a:t>in-</a:t>
             </a:r>
             <a:endParaRPr lang="en-US" sz="1300" dirty="0"/>
           </a:p>
@@ -37859,7 +37661,7 @@
                 <a:ea typeface="Trebuchet MS" pitchFamily="34" charset="-122"/>
                 <a:cs typeface="Trebuchet MS" pitchFamily="34" charset="-120"/>
               </a:rPr>
-              <a:t>out-</a:t>
+              <a:t>un-</a:t>
             </a:r>
             <a:endParaRPr lang="en-US" sz="1300" dirty="0"/>
           </a:p>
@@ -38012,7 +37814,7 @@
                 <a:ea typeface="Trebuchet MS" pitchFamily="34" charset="-122"/>
                 <a:cs typeface="Trebuchet MS" pitchFamily="34" charset="-120"/>
               </a:rPr>
-              <a:t>over-</a:t>
+              <a:t>be-</a:t>
             </a:r>
             <a:endParaRPr lang="en-US" sz="1300" dirty="0"/>
           </a:p>
@@ -38101,7 +37903,7 @@
                 <a:ea typeface="Trebuchet MS" pitchFamily="34" charset="-122"/>
                 <a:cs typeface="Trebuchet MS" pitchFamily="34" charset="-120"/>
               </a:rPr>
-              <a:t>-ish</a:t>
+              <a:t>-ness</a:t>
             </a:r>
             <a:endParaRPr lang="en-US" sz="1300" dirty="0"/>
           </a:p>
@@ -38165,7 +37967,7 @@
                 <a:ea typeface="Trebuchet MS" pitchFamily="34" charset="-122"/>
                 <a:cs typeface="Trebuchet MS" pitchFamily="34" charset="-120"/>
               </a:rPr>
-              <a:t>up-</a:t>
+              <a:t>over-</a:t>
             </a:r>
             <a:endParaRPr lang="en-US" sz="1300" dirty="0"/>
           </a:p>
@@ -38254,7 +38056,7 @@
                 <a:ea typeface="Trebuchet MS" pitchFamily="34" charset="-122"/>
                 <a:cs typeface="Trebuchet MS" pitchFamily="34" charset="-120"/>
               </a:rPr>
-              <a:t>-ness</a:t>
+              <a:t>-ish</a:t>
             </a:r>
             <a:endParaRPr lang="en-US" sz="1300" dirty="0"/>
           </a:p>
@@ -38318,7 +38120,7 @@
                 <a:ea typeface="Trebuchet MS" pitchFamily="34" charset="-122"/>
                 <a:cs typeface="Trebuchet MS" pitchFamily="34" charset="-120"/>
               </a:rPr>
-              <a:t>short-</a:t>
+              <a:t>fore-</a:t>
             </a:r>
             <a:endParaRPr lang="en-US" sz="1300" dirty="0"/>
           </a:p>
@@ -38407,7 +38209,7 @@
                 <a:ea typeface="Trebuchet MS" pitchFamily="34" charset="-122"/>
                 <a:cs typeface="Trebuchet MS" pitchFamily="34" charset="-120"/>
               </a:rPr>
-              <a:t>-y</a:t>
+              <a:t>-ly</a:t>
             </a:r>
             <a:endParaRPr lang="en-US" sz="1300" dirty="0"/>
           </a:p>
@@ -38461,7 +38263,7 @@
         <p:spPr>
           <a:xfrm>
             <a:off x="1508760" y="4178808"/>
-            <a:ext cx="1097280" cy="420624"/>
+            <a:ext cx="822960" cy="420624"/>
           </a:xfrm>
           <a:prstGeom prst="rect">
             <a:avLst>
@@ -38495,7 +38297,7 @@
         <p:spPr>
           <a:xfrm>
             <a:off x="1508760" y="4178808"/>
-            <a:ext cx="1097280" cy="420624"/>
+            <a:ext cx="822960" cy="420624"/>
           </a:xfrm>
           <a:prstGeom prst="rect">
             <a:avLst/>
@@ -38519,7 +38321,7 @@
                 <a:ea typeface="Trebuchet MS" pitchFamily="34" charset="-122"/>
                 <a:cs typeface="Trebuchet MS" pitchFamily="34" charset="-120"/>
               </a:rPr>
-              <a:t>fore-</a:t>
+              <a:t>in-</a:t>
             </a:r>
             <a:endParaRPr lang="en-US" sz="1300" dirty="0"/>
           </a:p>
@@ -38533,7 +38335,7 @@
         </p:nvSpPr>
         <p:spPr>
           <a:xfrm>
-            <a:off x="2633472" y="4178808"/>
+            <a:off x="2359152" y="4178808"/>
             <a:ext cx="320040" cy="420624"/>
           </a:xfrm>
           <a:prstGeom prst="rect">
@@ -38572,7 +38374,7 @@
         </p:nvSpPr>
         <p:spPr>
           <a:xfrm>
-            <a:off x="2980944" y="4178808"/>
+            <a:off x="2706624" y="4178808"/>
             <a:ext cx="1243584" cy="420624"/>
           </a:xfrm>
           <a:prstGeom prst="rect">
@@ -38606,7 +38408,7 @@
         </p:nvSpPr>
         <p:spPr>
           <a:xfrm>
-            <a:off x="2980944" y="4178808"/>
+            <a:off x="2706624" y="4178808"/>
             <a:ext cx="1243584" cy="420624"/>
           </a:xfrm>
           <a:prstGeom prst="rect">
@@ -38645,7 +38447,7 @@
         </p:nvSpPr>
         <p:spPr>
           <a:xfrm>
-            <a:off x="4251960" y="4178808"/>
+            <a:off x="3977640" y="4178808"/>
             <a:ext cx="320040" cy="420624"/>
           </a:xfrm>
           <a:prstGeom prst="rect">
@@ -38684,7 +38486,7 @@
         </p:nvSpPr>
         <p:spPr>
           <a:xfrm>
-            <a:off x="4599432" y="4178808"/>
+            <a:off x="4325112" y="4178808"/>
             <a:ext cx="822960" cy="420624"/>
           </a:xfrm>
           <a:prstGeom prst="rect">
@@ -38718,7 +38520,7 @@
         </p:nvSpPr>
         <p:spPr>
           <a:xfrm>
-            <a:off x="4599432" y="4178808"/>
+            <a:off x="4325112" y="4178808"/>
             <a:ext cx="822960" cy="420624"/>
           </a:xfrm>
           <a:prstGeom prst="rect">
@@ -38757,7 +38559,7 @@
         </p:nvSpPr>
         <p:spPr>
           <a:xfrm>
-            <a:off x="5495544" y="4178808"/>
+            <a:off x="5221224" y="4178808"/>
             <a:ext cx="365760" cy="420624"/>
           </a:xfrm>
           <a:prstGeom prst="rect">
@@ -38796,7 +38598,7 @@
         </p:nvSpPr>
         <p:spPr>
           <a:xfrm>
-            <a:off x="5907024" y="4178808"/>
+            <a:off x="5632704" y="4178808"/>
             <a:ext cx="2194560" cy="420624"/>
           </a:xfrm>
           <a:prstGeom prst="rect">
@@ -38823,7 +38625,7 @@
         </p:nvSpPr>
         <p:spPr>
           <a:xfrm>
-            <a:off x="5907024" y="4178808"/>
+            <a:off x="5632704" y="4178808"/>
             <a:ext cx="2194560" cy="420624"/>
           </a:xfrm>
           <a:prstGeom prst="rect">
@@ -38848,7 +38650,7 @@
                 <a:ea typeface="Trebuchet MS" pitchFamily="34" charset="-122"/>
                 <a:cs typeface="Trebuchet MS" pitchFamily="34" charset="-120"/>
               </a:rPr>
-              <a:t>tall</a:t>
+              <a:t>taller</a:t>
             </a:r>
             <a:endParaRPr lang="en-US" sz="1400" dirty="0"/>
           </a:p>
@@ -39140,7 +38942,7 @@
                 <a:ea typeface="Calibri" pitchFamily="34" charset="-122"/>
                 <a:cs typeface="Calibri" pitchFamily="34" charset="-120"/>
               </a:rPr>
-              <a:t>Word Labs  •  wordlabs.app  •  Root: 'tall' = great height, high stature</a:t>
+              <a:t>Word Labs  •  wordlabs.app  •  Root: 'tall' = high in stature or height</a:t>
             </a:r>
             <a:endParaRPr lang="en-US" sz="800" dirty="0"/>
           </a:p>
@@ -39252,7 +39054,7 @@
                 <a:ea typeface="Trebuchet MS" pitchFamily="34" charset="-122"/>
                 <a:cs typeface="Trebuchet MS" pitchFamily="34" charset="-120"/>
               </a:rPr>
-              <a:t>tall</a:t>
+              <a:t>taller</a:t>
             </a:r>
             <a:endParaRPr lang="en-US" sz="1200" dirty="0"/>
           </a:p>
@@ -39318,7 +39120,7 @@
                 <a:ea typeface="Calibri" pitchFamily="34" charset="-122"/>
                 <a:cs typeface="Calibri" pitchFamily="34" charset="-120"/>
               </a:rPr>
-              <a:t>Having a greater than usual height; reaching high up.</a:t>
+              <a:t>Being more tall than something or someone else.</a:t>
             </a:r>
             <a:endParaRPr lang="en-US" sz="1200" dirty="0"/>
           </a:p>
@@ -39391,7 +39193,7 @@
                 <a:ea typeface="Trebuchet MS" pitchFamily="34" charset="-122"/>
                 <a:cs typeface="Trebuchet MS" pitchFamily="34" charset="-120"/>
               </a:rPr>
-              <a:t>taller</a:t>
+              <a:t>tallest</a:t>
             </a:r>
             <a:endParaRPr lang="en-US" sz="1200" dirty="0"/>
           </a:p>
@@ -39457,7 +39259,7 @@
                 <a:ea typeface="Calibri" pitchFamily="34" charset="-122"/>
                 <a:cs typeface="Calibri" pitchFamily="34" charset="-120"/>
               </a:rPr>
-              <a:t>Having the greatest height of all in a group.</a:t>
+              <a:t>The quality or state of being tall.</a:t>
             </a:r>
             <a:endParaRPr lang="en-US" sz="1200" dirty="0"/>
           </a:p>
@@ -39530,7 +39332,7 @@
                 <a:ea typeface="Trebuchet MS" pitchFamily="34" charset="-122"/>
                 <a:cs typeface="Trebuchet MS" pitchFamily="34" charset="-120"/>
               </a:rPr>
-              <a:t>tallest</a:t>
+              <a:t>tallness</a:t>
             </a:r>
             <a:endParaRPr lang="en-US" sz="1200" dirty="0"/>
           </a:p>
@@ -39596,7 +39398,7 @@
                 <a:ea typeface="Calibri" pitchFamily="34" charset="-122"/>
                 <a:cs typeface="Calibri" pitchFamily="34" charset="-120"/>
               </a:rPr>
-              <a:t>Taller than what is considered normal or expected.</a:t>
+              <a:t>Having a greater than usual height from top to bottom.</a:t>
             </a:r>
             <a:endParaRPr lang="en-US" sz="1200" dirty="0"/>
           </a:p>
@@ -39669,7 +39471,7 @@
                 <a:ea typeface="Trebuchet MS" pitchFamily="34" charset="-122"/>
                 <a:cs typeface="Trebuchet MS" pitchFamily="34" charset="-120"/>
               </a:rPr>
-              <a:t>tallness</a:t>
+              <a:t>tallish</a:t>
             </a:r>
             <a:endParaRPr lang="en-US" sz="1200" dirty="0"/>
           </a:p>
@@ -39735,7 +39537,7 @@
                 <a:ea typeface="Calibri" pitchFamily="34" charset="-122"/>
                 <a:cs typeface="Calibri" pitchFamily="34" charset="-120"/>
               </a:rPr>
-              <a:t>The quality or state of being tall.</a:t>
+              <a:t>Somewhat tall, but not extremely tall.</a:t>
             </a:r>
             <a:endParaRPr lang="en-US" sz="1200" dirty="0"/>
           </a:p>
@@ -39808,7 +39610,7 @@
                 <a:ea typeface="Trebuchet MS" pitchFamily="34" charset="-122"/>
                 <a:cs typeface="Trebuchet MS" pitchFamily="34" charset="-120"/>
               </a:rPr>
-              <a:t>tallish</a:t>
+              <a:t>overtall</a:t>
             </a:r>
             <a:endParaRPr lang="en-US" sz="1200" dirty="0"/>
           </a:p>
@@ -39874,7 +39676,7 @@
                 <a:ea typeface="Calibri" pitchFamily="34" charset="-122"/>
                 <a:cs typeface="Calibri" pitchFamily="34" charset="-120"/>
               </a:rPr>
-              <a:t>Somewhat tall; fairly tall but not completely.</a:t>
+              <a:t>Taller than what is expected or needed.</a:t>
             </a:r>
             <a:endParaRPr lang="en-US" sz="1200" dirty="0"/>
           </a:p>
@@ -39947,7 +39749,7 @@
                 <a:ea typeface="Trebuchet MS" pitchFamily="34" charset="-122"/>
                 <a:cs typeface="Trebuchet MS" pitchFamily="34" charset="-120"/>
               </a:rPr>
-              <a:t>overtall</a:t>
+              <a:t>tall</a:t>
             </a:r>
             <a:endParaRPr lang="en-US" sz="1200" dirty="0"/>
           </a:p>
@@ -40013,7 +39815,7 @@
                 <a:ea typeface="Calibri" pitchFamily="34" charset="-122"/>
                 <a:cs typeface="Calibri" pitchFamily="34" charset="-120"/>
               </a:rPr>
-              <a:t>To be taller than another person or thing.</a:t>
+              <a:t>A tall piece of furniture with drawers for storing clothes.</a:t>
             </a:r>
             <a:endParaRPr lang="en-US" sz="1200" dirty="0"/>
           </a:p>
@@ -40086,7 +39888,7 @@
                 <a:ea typeface="Trebuchet MS" pitchFamily="34" charset="-122"/>
                 <a:cs typeface="Trebuchet MS" pitchFamily="34" charset="-120"/>
               </a:rPr>
-              <a:t>outtall</a:t>
+              <a:t>tallboy</a:t>
             </a:r>
             <a:endParaRPr lang="en-US" sz="1200" dirty="0"/>
           </a:p>
@@ -40152,7 +39954,7 @@
                 <a:ea typeface="Calibri" pitchFamily="34" charset="-122"/>
                 <a:cs typeface="Calibri" pitchFamily="34" charset="-120"/>
               </a:rPr>
-              <a:t>Having more height than someone or something else.</a:t>
+              <a:t>The most tall of all — nothing is higher.</a:t>
             </a:r>
             <a:endParaRPr lang="en-US" sz="1200" dirty="0"/>
           </a:p>
@@ -40444,7 +40246,7 @@
                 <a:ea typeface="Calibri" pitchFamily="34" charset="-122"/>
                 <a:cs typeface="Calibri" pitchFamily="34" charset="-120"/>
               </a:rPr>
-              <a:t>Word Labs  •  wordlabs.app  •  Root: 'tall' = great height, high stature</a:t>
+              <a:t>Word Labs  •  wordlabs.app  •  Root: 'tall' = high in stature or height</a:t>
             </a:r>
             <a:endParaRPr lang="en-US" sz="800" dirty="0"/>
           </a:p>
@@ -40647,7 +40449,7 @@
                 <a:ea typeface="Calibri" pitchFamily="34" charset="-122"/>
                 <a:cs typeface="Calibri" pitchFamily="34" charset="-120"/>
               </a:rPr>
-              <a:t>The tallest tree in the forest could be seen from kilometres away.</a:t>
+              <a:t>The tallest tree in the forest could be seen from the other side of the valley.</a:t>
             </a:r>
             <a:endParaRPr lang="en-US" sz="1500" dirty="0"/>
           </a:p>
@@ -40811,7 +40613,7 @@
                 <a:ea typeface="Calibri" pitchFamily="34" charset="-122"/>
                 <a:cs typeface="Calibri" pitchFamily="34" charset="-120"/>
               </a:rPr>
-              <a:t>She was proud of her tallness because it helped her reach the top shelf easily.</a:t>
+              <a:t>She noticed a tallness about her new classmate that made him stand out in the crowd.</a:t>
             </a:r>
             <a:endParaRPr lang="en-US" sz="1500" dirty="0"/>
           </a:p>
@@ -40975,7 +40777,7 @@
                 <a:ea typeface="Calibri" pitchFamily="34" charset="-122"/>
                 <a:cs typeface="Calibri" pitchFamily="34" charset="-120"/>
               </a:rPr>
-              <a:t>The new student was tallish, standing just a little above most of his classmates.</a:t>
+              <a:t>The giraffe was considerably taller than any other animal at the wildlife sanctuary.</a:t>
             </a:r>
             <a:endParaRPr lang="en-US" sz="1500" dirty="0"/>
           </a:p>
